--- a/docs/content/materials/presentation.pptx
+++ b/docs/content/materials/presentation.pptx
@@ -3184,7 +3184,7 @@
             </a:pPr>
             <a:r>
               <a:rPr/>
-              <a:t>2025-11-09</a:t>
+              <a:t>2025-11-10</a:t>
             </a:r>
           </a:p>
         </p:txBody>
